--- a/curso/pptx/S89.pptx
+++ b/curso/pptx/S89.pptx
@@ -3800,7 +3800,7 @@
                 </a:solidFill>
                 <a:latin typeface="Nunito Sans"/>
               </a:rPr>
-              <a:t>Omar no sabe qué hacer tras 4.º. Le gusta arreglar cosas y se le dan bien las mates. Su cuadrilla va a Bachillerato. (Ejemplo inventado.)</a:t>
+              <a:t>Un chico no sabe qué hacer tras 4.º. Le gusta arreglar cosas y se le dan bien las mates. Su cuadrilla va a Bachillerato. (Ejemplo inventado.)</a:t>
             </a:r>
           </a:p>
         </p:txBody>
@@ -4127,7 +4127,7 @@
                 </a:solidFill>
                 <a:latin typeface="Nunito Sans"/>
               </a:rPr>
-              <a:t>Naiara cree que su examen está mal corregido: una respuesta correcta tiene un cero. Quiere protestar en clase a gritos. (Ejemplo inventado.)</a:t>
+              <a:t>Una chica cree que su examen está mal corregido: una respuesta correcta tiene un cero. Quiere protestar en clase a gritos. (Ejemplo inventado.)</a:t>
             </a:r>
           </a:p>
         </p:txBody>
@@ -4472,7 +4472,7 @@
                 </a:solidFill>
                 <a:latin typeface="Nunito Sans"/>
               </a:rPr>
-              <a:t>Yasmin irá a Bachillerato de Humanidades. Le encanta la historia y quiere ser periodista. Además, van tres amigas suyas. (Ejemplo inventado.)</a:t>
+              <a:t>Una chica irá a Bachillerato de Humanidades. Le encanta la historia y quiere ser periodista. Además, van tres amigas suyas. (Ejemplo inventado.)</a:t>
             </a:r>
           </a:p>
         </p:txBody>
@@ -4570,7 +4570,7 @@
                 </a:solidFill>
                 <a:latin typeface="Nunito Sans"/>
               </a:rPr>
-              <a:t>Pero Yasmin tiene razones propias: le gusta la historia y sabe a qué quiere dedicarse.</a:t>
+              <a:t>Pero esa chica tiene razones propias: le gusta la historia y sabe a qué quiere dedicarse.</a:t>
             </a:r>
           </a:p>
           <a:p>
@@ -6800,7 +6800,7 @@
                 </a:solidFill>
                 <a:latin typeface="Nunito Sans"/>
               </a:rPr>
-              <a:t>Alguien le dice a Maialen: «Si no vas a la universidad, serás una fracasada».</a:t>
+              <a:t>Alguien le dice a una chica: «Si no vas a la universidad, serás una fracasada».</a:t>
             </a:r>
           </a:p>
         </p:txBody>

--- a/curso/pptx/S89.pptx
+++ b/curso/pptx/S89.pptx
@@ -22,7 +22,6 @@
     <p:sldId id="270" r:id="rId22"/>
     <p:sldId id="271" r:id="rId23"/>
     <p:sldId id="272" r:id="rId24"/>
-    <p:sldId id="273" r:id="rId25"/>
   </p:sldIdLst>
   <p:sldSz cx="12192000" cy="6858000" type="screen4x3"/>
   <p:notesSz cx="6858000" cy="9144000"/>
@@ -3536,7 +3535,7 @@
                 </a:solidFill>
                 <a:latin typeface="Nunito Sans"/>
               </a:rPr>
-              <a:t>PENSAMIENTO CRÍTICO · SESIÓN 89 · UNIDAD 20 · MODAS, OCIO Y FUTURO</a:t>
+              <a:t>PENSAMIENTO CRÍTICO · SESIÓN 89 · UNIDAD 20 · NÚMEROS QUE ENGAÑAN</a:t>
             </a:r>
           </a:p>
         </p:txBody>
@@ -3575,7 +3574,7 @@
                 </a:solidFill>
                 <a:latin typeface="Fredoka"/>
               </a:rPr>
-              <a:t>¿Y después de la ESO?</a:t>
+              <a:t>Encuestas y muestras</a:t>
             </a:r>
           </a:p>
         </p:txBody>
@@ -3614,7 +3613,7 @@
                 </a:solidFill>
                 <a:latin typeface="Nunito Sans"/>
               </a:rPr>
-              <a:t>Tras 4.º de ESO hay varios caminos que se cruzan; lo que cuenta es elegir con buenas razones, conociendo derechos y deberes.</a:t>
+              <a:t>Una encuesta es más fiable si la muestra se parece a la población; muchas respuestas no arreglan una muestra sesgada.</a:t>
             </a:r>
           </a:p>
         </p:txBody>
@@ -3718,7 +3717,7 @@
                 </a:solidFill>
                 <a:latin typeface="Fredoka"/>
               </a:rPr>
-              <a:t>Caso 1 · Elegir con razones</a:t>
+              <a:t>Caso 1 · La encuesta del principio</a:t>
             </a:r>
           </a:p>
         </p:txBody>
@@ -3800,7 +3799,7 @@
                 </a:solidFill>
                 <a:latin typeface="Nunito Sans"/>
               </a:rPr>
-              <a:t>Un chico no sabe qué hacer tras 4.º. Le gusta arreglar cosas y se le dan bien las mates. Su cuadrilla va a Bachillerato. (Ejemplo inventado.)</a:t>
+              <a:t>Una youtuber de videojuegos pregunta a sus seguidores si les gustan los videojuegos. El 95 % dice que sí.</a:t>
             </a:r>
           </a:p>
         </p:txBody>
@@ -3848,7 +3847,7 @@
                 </a:solidFill>
                 <a:latin typeface="Nunito Sans"/>
               </a:rPr>
-              <a:t>Primero, razones suyas: qué le gusta, qué se le da bien, a qué quiere dedicarse.</a:t>
+              <a:t>¿A quiénes preguntó? A sus seguidores: gente que ya ve vídeos de videojuegos.</a:t>
             </a:r>
           </a:p>
           <a:p>
@@ -3873,25 +3872,7 @@
                 </a:solidFill>
                 <a:latin typeface="Nunito Sans"/>
               </a:rPr>
-              <a:t>Después, información: el </a:t>
-            </a:r>
-            <a:r>
-              <a:rPr sz="2400" b="1">
-                <a:solidFill>
-                  <a:srgbClr val="1F2A44"/>
-                </a:solidFill>
-                <a:latin typeface="Nunito Sans"/>
-              </a:rPr>
-              <a:t>orientador</a:t>
-            </a:r>
-            <a:r>
-              <a:rPr sz="2400" b="0">
-                <a:solidFill>
-                  <a:srgbClr val="1F2A44"/>
-                </a:solidFill>
-                <a:latin typeface="Nunito Sans"/>
-              </a:rPr>
-              <a:t> del centro, jornadas de puertas abiertas, gente que lo estudia.</a:t>
+              <a:t>¿Se parecen a todos los jóvenes? No: quien no juega no la sigue.</a:t>
             </a:r>
           </a:p>
           <a:p>
@@ -3916,7 +3897,7 @@
                 </a:solidFill>
                 <a:latin typeface="Nunito Sans"/>
               </a:rPr>
-              <a:t>¿Bachillerato de Ciencias o una FP de mantenimiento? Las dos pueden encajar con sus razones.</a:t>
+              <a:t>La muestra está sesgada: se inclina hacia un lado.</a:t>
             </a:r>
           </a:p>
           <a:p>
@@ -3941,7 +3922,7 @@
                 </a:solidFill>
                 <a:latin typeface="Nunito Sans"/>
               </a:rPr>
-              <a:t>Conclusión: se elige con razones propias e información. La cuadrilla importa, pero no decide por ti.</a:t>
+              <a:t>Conclusión: el 95 % habla de sus seguidores, no de todos los jóvenes.</a:t>
             </a:r>
           </a:p>
         </p:txBody>
@@ -4045,7 +4026,7 @@
                 </a:solidFill>
                 <a:latin typeface="Fredoka"/>
               </a:rPr>
-              <a:t>Caso 2 · La nota del examen</a:t>
+              <a:t>Caso 2 · «9 de cada 10»</a:t>
             </a:r>
           </a:p>
         </p:txBody>
@@ -4127,7 +4108,7 @@
                 </a:solidFill>
                 <a:latin typeface="Nunito Sans"/>
               </a:rPr>
-              <a:t>Una chica cree que su examen está mal corregido: una respuesta correcta tiene un cero. Quiere protestar en clase a gritos. (Ejemplo inventado.)</a:t>
+              <a:t>Anuncio: «9 de cada 10 usuarios recomiendan nuestras zapatillas». En letra pequeña: «Encuesta a 10 clientes de nuestra tienda». (Ejemplo inventado.)</a:t>
             </a:r>
           </a:p>
         </p:txBody>
@@ -4175,25 +4156,7 @@
                 </a:solidFill>
                 <a:latin typeface="Nunito Sans"/>
               </a:rPr>
-              <a:t>Tiene </a:t>
-            </a:r>
-            <a:r>
-              <a:rPr sz="2400" b="1">
-                <a:solidFill>
-                  <a:srgbClr val="1F2A44"/>
-                </a:solidFill>
-                <a:latin typeface="Nunito Sans"/>
-              </a:rPr>
-              <a:t>derecho</a:t>
-            </a:r>
-            <a:r>
-              <a:rPr sz="2400" b="0">
-                <a:solidFill>
-                  <a:srgbClr val="1F2A44"/>
-                </a:solidFill>
-                <a:latin typeface="Nunito Sans"/>
-              </a:rPr>
-              <a:t> a una evaluación objetiva y a pedir que se revise.</a:t>
+              <a:t>¿A cuántos? Solo a 10 personas.</a:t>
             </a:r>
           </a:p>
           <a:p>
@@ -4218,25 +4181,7 @@
                 </a:solidFill>
                 <a:latin typeface="Nunito Sans"/>
               </a:rPr>
-              <a:t>También tiene </a:t>
-            </a:r>
-            <a:r>
-              <a:rPr sz="2400" b="1">
-                <a:solidFill>
-                  <a:srgbClr val="1F2A44"/>
-                </a:solidFill>
-                <a:latin typeface="Nunito Sans"/>
-              </a:rPr>
-              <a:t>deberes</a:t>
-            </a:r>
-            <a:r>
-              <a:rPr sz="2400" b="0">
-                <a:solidFill>
-                  <a:srgbClr val="1F2A44"/>
-                </a:solidFill>
-                <a:latin typeface="Nunito Sans"/>
-              </a:rPr>
-              <a:t>: respetar al profesorado y a la clase.</a:t>
+              <a:t>¿A quiénes? A clientes que ya las compraron en su tienda.</a:t>
             </a:r>
           </a:p>
           <a:p>
@@ -4261,7 +4206,7 @@
                 </a:solidFill>
                 <a:latin typeface="Nunito Sans"/>
               </a:rPr>
-              <a:t>Camino: pedir ver el examen y preguntar. Si sigue sin estar de acuerdo, puede hacer una reclamación.</a:t>
+              <a:t>Muestra pequeña y sesgada: quien las compró ya tenía buena opinión de ellas.</a:t>
             </a:r>
           </a:p>
           <a:p>
@@ -4286,7 +4231,7 @@
                 </a:solidFill>
                 <a:latin typeface="Nunito Sans"/>
               </a:rPr>
-              <a:t>Conclusión: derechos y deberes van juntos. Defender un derecho no exige saltarse un deber.</a:t>
+              <a:t>Conclusión: «9 de cada 10» suena a mucho, pero son 9 personas elegidas por la marca.</a:t>
             </a:r>
           </a:p>
         </p:txBody>
@@ -4300,6 +4245,315 @@
 </file>
 
 <file path=ppt/slides/slide12.xml><?xml version="1.0" encoding="utf-8"?>
+<p:sld xmlns:a="http://schemas.openxmlformats.org/drawingml/2006/main" xmlns:p="http://schemas.openxmlformats.org/presentationml/2006/main" xmlns:r="http://schemas.openxmlformats.org/officeDocument/2006/relationships">
+  <p:cSld>
+    <p:bg>
+      <p:bgPr>
+        <a:solidFill>
+          <a:srgbClr val="FBF7EF"/>
+        </a:solidFill>
+        <a:effectLst/>
+      </p:bgPr>
+    </p:bg>
+    <p:spTree>
+      <p:nvGrpSpPr>
+        <p:cNvPr id="1" name=""/>
+        <p:cNvGrpSpPr/>
+        <p:nvPr/>
+      </p:nvGrpSpPr>
+      <p:grpSpPr/>
+      <p:sp>
+        <p:nvSpPr>
+          <p:cNvPr id="2" name="TextBox 1"/>
+          <p:cNvSpPr txBox="1"/>
+          <p:nvPr/>
+        </p:nvSpPr>
+        <p:spPr>
+          <a:xfrm>
+            <a:off x="640000" y="380000"/>
+            <a:ext cx="10912000" cy="420000"/>
+          </a:xfrm>
+          <a:prstGeom prst="rect">
+            <a:avLst/>
+          </a:prstGeom>
+          <a:noFill/>
+        </p:spPr>
+        <p:txBody>
+          <a:bodyPr wrap="square">
+            <a:spAutoFit/>
+          </a:bodyPr>
+          <a:lstStyle/>
+          <a:p>
+            <a:pPr>
+              <a:spcAft>
+                <a:spcPts val="630"/>
+              </a:spcAft>
+            </a:pPr>
+            <a:r>
+              <a:rPr sz="1400" b="1">
+                <a:solidFill>
+                  <a:srgbClr val="E8793A"/>
+                </a:solidFill>
+                <a:latin typeface="Nunito Sans"/>
+              </a:rPr>
+              <a:t>BLOQUE 2 · CASOS RESUELTOS</a:t>
+            </a:r>
+          </a:p>
+        </p:txBody>
+      </p:sp>
+      <p:sp>
+        <p:nvSpPr>
+          <p:cNvPr id="3" name="TextBox 2"/>
+          <p:cNvSpPr txBox="1"/>
+          <p:nvPr/>
+        </p:nvSpPr>
+        <p:spPr>
+          <a:xfrm>
+            <a:off x="640000" y="760000"/>
+            <a:ext cx="10912000" cy="800000"/>
+          </a:xfrm>
+          <a:prstGeom prst="rect">
+            <a:avLst/>
+          </a:prstGeom>
+          <a:noFill/>
+        </p:spPr>
+        <p:txBody>
+          <a:bodyPr wrap="square">
+            <a:spAutoFit/>
+          </a:bodyPr>
+          <a:lstStyle/>
+          <a:p>
+            <a:pPr>
+              <a:spcAft>
+                <a:spcPts val="1710"/>
+              </a:spcAft>
+            </a:pPr>
+            <a:r>
+              <a:rPr sz="3800" b="1">
+                <a:solidFill>
+                  <a:srgbClr val="1F2A44"/>
+                </a:solidFill>
+                <a:latin typeface="Fredoka"/>
+              </a:rPr>
+              <a:t>Caso 3 · La pregunta que empuja</a:t>
+            </a:r>
+          </a:p>
+        </p:txBody>
+      </p:sp>
+      <p:sp>
+        <p:nvSpPr>
+          <p:cNvPr id="4" name="Rectangle 3"/>
+          <p:cNvSpPr/>
+          <p:nvPr/>
+        </p:nvSpPr>
+        <p:spPr>
+          <a:xfrm>
+            <a:off x="640000" y="1600000"/>
+            <a:ext cx="10912000" cy="1100000"/>
+          </a:xfrm>
+          <a:prstGeom prst="rect">
+            <a:avLst/>
+          </a:prstGeom>
+          <a:solidFill>
+            <a:srgbClr val="FFFFFF"/>
+          </a:solidFill>
+          <a:ln>
+            <a:noFill/>
+          </a:ln>
+        </p:spPr>
+        <p:style>
+          <a:lnRef idx="1">
+            <a:schemeClr val="accent1"/>
+          </a:lnRef>
+          <a:fillRef idx="3">
+            <a:schemeClr val="accent1"/>
+          </a:fillRef>
+          <a:effectRef idx="2">
+            <a:schemeClr val="accent1"/>
+          </a:effectRef>
+          <a:fontRef idx="minor">
+            <a:schemeClr val="lt1"/>
+          </a:fontRef>
+        </p:style>
+        <p:txBody>
+          <a:bodyPr rtlCol="0" anchor="ctr"/>
+          <a:lstStyle/>
+          <a:p>
+            <a:pPr algn="ctr"/>
+          </a:p>
+        </p:txBody>
+      </p:sp>
+      <p:sp>
+        <p:nvSpPr>
+          <p:cNvPr id="5" name="TextBox 4"/>
+          <p:cNvSpPr txBox="1"/>
+          <p:nvPr/>
+        </p:nvSpPr>
+        <p:spPr>
+          <a:xfrm>
+            <a:off x="840000" y="1650000"/>
+            <a:ext cx="10512000" cy="1000000"/>
+          </a:xfrm>
+          <a:prstGeom prst="rect">
+            <a:avLst/>
+          </a:prstGeom>
+          <a:noFill/>
+        </p:spPr>
+        <p:txBody>
+          <a:bodyPr wrap="square" anchor="ctr">
+            <a:spAutoFit/>
+          </a:bodyPr>
+          <a:lstStyle/>
+          <a:p>
+            <a:pPr>
+              <a:spcAft>
+                <a:spcPts val="1170"/>
+              </a:spcAft>
+            </a:pPr>
+            <a:r>
+              <a:rPr sz="2600" b="1">
+                <a:solidFill>
+                  <a:srgbClr val="1F2A44"/>
+                </a:solidFill>
+                <a:latin typeface="Nunito Sans"/>
+              </a:rPr>
+              <a:t>Encuesta del instituto (inventada): «¿Estás de acuerdo en que el recreo es demasiado corto y hay que alargarlo?»</a:t>
+            </a:r>
+          </a:p>
+        </p:txBody>
+      </p:sp>
+      <p:sp>
+        <p:nvSpPr>
+          <p:cNvPr id="6" name="TextBox 5"/>
+          <p:cNvSpPr txBox="1"/>
+          <p:nvPr/>
+        </p:nvSpPr>
+        <p:spPr>
+          <a:xfrm>
+            <a:off x="640000" y="2900000"/>
+            <a:ext cx="10912000" cy="3500000"/>
+          </a:xfrm>
+          <a:prstGeom prst="rect">
+            <a:avLst/>
+          </a:prstGeom>
+          <a:noFill/>
+        </p:spPr>
+        <p:txBody>
+          <a:bodyPr wrap="square">
+            <a:spAutoFit/>
+          </a:bodyPr>
+          <a:lstStyle/>
+          <a:p>
+            <a:pPr>
+              <a:spcAft>
+                <a:spcPts val="1080"/>
+              </a:spcAft>
+            </a:pPr>
+            <a:r>
+              <a:rPr sz="2400" b="1">
+                <a:solidFill>
+                  <a:srgbClr val="E8793A"/>
+                </a:solidFill>
+                <a:latin typeface="Nunito Sans"/>
+              </a:rPr>
+              <a:t>1. </a:t>
+            </a:r>
+            <a:r>
+              <a:rPr sz="2400" b="0">
+                <a:solidFill>
+                  <a:srgbClr val="1F2A44"/>
+                </a:solidFill>
+                <a:latin typeface="Nunito Sans"/>
+              </a:rPr>
+              <a:t>La pregunta ya dice lo que piensa quien pregunta: «demasiado corto».</a:t>
+            </a:r>
+          </a:p>
+          <a:p>
+            <a:pPr>
+              <a:spcAft>
+                <a:spcPts val="1080"/>
+              </a:spcAft>
+            </a:pPr>
+            <a:r>
+              <a:rPr sz="2400" b="1">
+                <a:solidFill>
+                  <a:srgbClr val="E8793A"/>
+                </a:solidFill>
+                <a:latin typeface="Nunito Sans"/>
+              </a:rPr>
+              <a:t>2. </a:t>
+            </a:r>
+            <a:r>
+              <a:rPr sz="2400" b="0">
+                <a:solidFill>
+                  <a:srgbClr val="1F2A44"/>
+                </a:solidFill>
+                <a:latin typeface="Nunito Sans"/>
+              </a:rPr>
+              <a:t>Empuja a contestar que sí.</a:t>
+            </a:r>
+          </a:p>
+          <a:p>
+            <a:pPr>
+              <a:spcAft>
+                <a:spcPts val="1080"/>
+              </a:spcAft>
+            </a:pPr>
+            <a:r>
+              <a:rPr sz="2400" b="1">
+                <a:solidFill>
+                  <a:srgbClr val="E8793A"/>
+                </a:solidFill>
+                <a:latin typeface="Nunito Sans"/>
+              </a:rPr>
+              <a:t>3. </a:t>
+            </a:r>
+            <a:r>
+              <a:rPr sz="2400" b="0">
+                <a:solidFill>
+                  <a:srgbClr val="1F2A44"/>
+                </a:solidFill>
+                <a:latin typeface="Nunito Sans"/>
+              </a:rPr>
+              <a:t>Una pregunta neutral sería: «¿Qué te parece la duración del recreo?»</a:t>
+            </a:r>
+          </a:p>
+          <a:p>
+            <a:pPr>
+              <a:spcAft>
+                <a:spcPts val="1080"/>
+              </a:spcAft>
+            </a:pPr>
+            <a:r>
+              <a:rPr sz="2400" b="1">
+                <a:solidFill>
+                  <a:srgbClr val="E8793A"/>
+                </a:solidFill>
+                <a:latin typeface="Nunito Sans"/>
+              </a:rPr>
+              <a:t>4. </a:t>
+            </a:r>
+            <a:r>
+              <a:rPr sz="2400" b="0">
+                <a:solidFill>
+                  <a:srgbClr val="1F2A44"/>
+                </a:solidFill>
+                <a:latin typeface="Nunito Sans"/>
+              </a:rPr>
+              <a:t>Conclusión: además de a quién se pregunta, importa cómo se pregunta. Lo vimos en la sesión 12.</a:t>
+            </a:r>
+          </a:p>
+        </p:txBody>
+      </p:sp>
+    </p:spTree>
+  </p:cSld>
+  <p:clrMapOvr>
+    <a:masterClrMapping/>
+  </p:clrMapOvr>
+</p:sld>
+</file>
+
+<file path=ppt/slides/slide13.xml><?xml version="1.0" encoding="utf-8"?>
 <p:sld xmlns:a="http://schemas.openxmlformats.org/drawingml/2006/main" xmlns:p="http://schemas.openxmlformats.org/presentationml/2006/main" xmlns:r="http://schemas.openxmlformats.org/officeDocument/2006/relationships">
   <p:cSld>
     <p:bg>
@@ -4390,7 +4644,7 @@
                 </a:solidFill>
                 <a:latin typeface="Fredoka"/>
               </a:rPr>
-              <a:t>⚠ Con la cuadrilla, ¿mal?</a:t>
+              <a:t>⚠ Dos millones de respuestas</a:t>
             </a:r>
           </a:p>
         </p:txBody>
@@ -4472,7 +4726,7 @@
                 </a:solidFill>
                 <a:latin typeface="Nunito Sans"/>
               </a:rPr>
-              <a:t>Una chica irá a Bachillerato de Humanidades. Le encanta la historia y quiere ser periodista. Además, van tres amigas suyas. (Ejemplo inventado.)</a:t>
+              <a:t>EE. UU., 1936. Una revista recibe más de dos millones de respuestas sobre quién ganará las elecciones. Otra encuesta pregunta a muchas menos personas, elegidas para parecerse al país.</a:t>
             </a:r>
           </a:p>
         </p:txBody>
@@ -4520,7 +4774,7 @@
                 </a:solidFill>
                 <a:latin typeface="Nunito Sans"/>
               </a:rPr>
-              <a:t>Elige lo mismo que su grupo. ¿Se está dejando llevar?</a:t>
+              <a:t>¿Cuál acertó? La de dos millones, ¿no?</a:t>
             </a:r>
           </a:p>
           <a:p>
@@ -4545,7 +4799,7 @@
                 </a:solidFill>
                 <a:latin typeface="Nunito Sans"/>
               </a:rPr>
-              <a:t>Parece que sí: hemos visto que seguir al grupo sin pensar es un error.</a:t>
+              <a:t>No: la revista falló por mucho. Quienes le contestaron no se parecían al conjunto de votantes.</a:t>
             </a:r>
           </a:p>
           <a:p>
@@ -4570,7 +4824,7 @@
                 </a:solidFill>
                 <a:latin typeface="Nunito Sans"/>
               </a:rPr>
-              <a:t>Pero esa chica tiene razones propias: le gusta la historia y sabe a qué quiere dedicarse.</a:t>
+              <a:t>La encuesta pequeña acertó el ganador: su muestra se parecía más al país.</a:t>
             </a:r>
           </a:p>
           <a:p>
@@ -4595,7 +4849,7 @@
                 </a:solidFill>
                 <a:latin typeface="Nunito Sans"/>
               </a:rPr>
-              <a:t>Ir con amigas es una razón más, no la única. Eso no es dejarse llevar.</a:t>
+              <a:t>Más respuestas no arreglan una muestra sesgada: repiten el mismo error muchas más veces.</a:t>
             </a:r>
           </a:p>
           <a:p>
@@ -4620,129 +4874,7 @@
                 </a:solidFill>
                 <a:latin typeface="Nunito Sans"/>
               </a:rPr>
-              <a:t>Conclusión: coincidir con el grupo no es el error. El error es que el grupo sea la </a:t>
-            </a:r>
-            <a:r>
-              <a:rPr sz="2400" b="1">
-                <a:solidFill>
-                  <a:srgbClr val="1F2A44"/>
-                </a:solidFill>
-                <a:latin typeface="Nunito Sans"/>
-              </a:rPr>
-              <a:t>única</a:t>
-            </a:r>
-            <a:r>
-              <a:rPr sz="2400" b="0">
-                <a:solidFill>
-                  <a:srgbClr val="1F2A44"/>
-                </a:solidFill>
-                <a:latin typeface="Nunito Sans"/>
-              </a:rPr>
-              <a:t> razón.</a:t>
-            </a:r>
-          </a:p>
-        </p:txBody>
-      </p:sp>
-    </p:spTree>
-  </p:cSld>
-  <p:clrMapOvr>
-    <a:masterClrMapping/>
-  </p:clrMapOvr>
-</p:sld>
-</file>
-
-<file path=ppt/slides/slide13.xml><?xml version="1.0" encoding="utf-8"?>
-<p:sld xmlns:a="http://schemas.openxmlformats.org/drawingml/2006/main" xmlns:p="http://schemas.openxmlformats.org/presentationml/2006/main" xmlns:r="http://schemas.openxmlformats.org/officeDocument/2006/relationships">
-  <p:cSld>
-    <p:bg>
-      <p:bgPr>
-        <a:solidFill>
-          <a:srgbClr val="1F2A44"/>
-        </a:solidFill>
-        <a:effectLst/>
-      </p:bgPr>
-    </p:bg>
-    <p:spTree>
-      <p:nvGrpSpPr>
-        <p:cNvPr id="1" name=""/>
-        <p:cNvGrpSpPr/>
-        <p:nvPr/>
-      </p:nvGrpSpPr>
-      <p:grpSpPr/>
-      <p:sp>
-        <p:nvSpPr>
-          <p:cNvPr id="2" name="TextBox 1"/>
-          <p:cNvSpPr txBox="1"/>
-          <p:nvPr/>
-        </p:nvSpPr>
-        <p:spPr>
-          <a:xfrm>
-            <a:off x="640000" y="2300000"/>
-            <a:ext cx="10912000" cy="500000"/>
-          </a:xfrm>
-          <a:prstGeom prst="rect">
-            <a:avLst/>
-          </a:prstGeom>
-          <a:noFill/>
-        </p:spPr>
-        <p:txBody>
-          <a:bodyPr wrap="square">
-            <a:spAutoFit/>
-          </a:bodyPr>
-          <a:lstStyle/>
-          <a:p>
-            <a:pPr>
-              <a:spcAft>
-                <a:spcPts val="810"/>
-              </a:spcAft>
-            </a:pPr>
-            <a:r>
-              <a:rPr sz="1800" b="1">
-                <a:solidFill>
-                  <a:srgbClr val="F4B183"/>
-                </a:solidFill>
-                <a:latin typeface="Nunito Sans"/>
-              </a:rPr>
-              <a:t>BLOQUE 3</a:t>
-            </a:r>
-          </a:p>
-        </p:txBody>
-      </p:sp>
-      <p:sp>
-        <p:nvSpPr>
-          <p:cNvPr id="3" name="TextBox 2"/>
-          <p:cNvSpPr txBox="1"/>
-          <p:nvPr/>
-        </p:nvSpPr>
-        <p:spPr>
-          <a:xfrm>
-            <a:off x="640000" y="2800000"/>
-            <a:ext cx="10912000" cy="800000"/>
-          </a:xfrm>
-          <a:prstGeom prst="rect">
-            <a:avLst/>
-          </a:prstGeom>
-          <a:noFill/>
-        </p:spPr>
-        <p:txBody>
-          <a:bodyPr wrap="square">
-            <a:spAutoFit/>
-          </a:bodyPr>
-          <a:lstStyle/>
-          <a:p>
-            <a:pPr>
-              <a:spcAft>
-                <a:spcPts val="2160"/>
-              </a:spcAft>
-            </a:pPr>
-            <a:r>
-              <a:rPr sz="4800" b="1">
-                <a:solidFill>
-                  <a:srgbClr val="FBF7EF"/>
-                </a:solidFill>
-                <a:latin typeface="Fredoka"/>
-              </a:rPr>
-              <a:t>Error típico: la escalera</a:t>
+              <a:t>Conclusión: primero, ¿a quiénes?; luego, ¿a cuántos? Una muestra grande pero sesgada sigue fallando.</a:t>
             </a:r>
           </a:p>
         </p:txBody>
@@ -4807,7 +4939,7 @@
                 </a:solidFill>
                 <a:latin typeface="Nunito Sans"/>
               </a:rPr>
-              <a:t>BLOQUE 3 · ERROR TÍPICO: LA ESCALERA</a:t>
+              <a:t>LO DE HOY EN TRES LÍNEAS</a:t>
             </a:r>
           </a:p>
         </p:txBody>
@@ -4846,103 +4978,21 @@
                 </a:solidFill>
                 <a:latin typeface="Fredoka"/>
               </a:rPr>
-              <a:t>¿Escalera o mapa?</a:t>
-            </a:r>
-          </a:p>
-        </p:txBody>
-      </p:sp>
-      <p:sp>
-        <p:nvSpPr>
-          <p:cNvPr id="4" name="Rectangle 3"/>
-          <p:cNvSpPr/>
-          <p:nvPr/>
-        </p:nvSpPr>
-        <p:spPr>
-          <a:xfrm>
-            <a:off x="640000" y="1650000"/>
-            <a:ext cx="5306000" cy="4400000"/>
-          </a:xfrm>
-          <a:prstGeom prst="rect">
-            <a:avLst/>
-          </a:prstGeom>
-          <a:solidFill>
-            <a:srgbClr val="FBE3D2"/>
-          </a:solidFill>
-          <a:ln>
-            <a:noFill/>
-          </a:ln>
-        </p:spPr>
-        <p:style>
-          <a:lnRef idx="1">
-            <a:schemeClr val="accent1"/>
-          </a:lnRef>
-          <a:fillRef idx="3">
-            <a:schemeClr val="accent1"/>
-          </a:fillRef>
-          <a:effectRef idx="2">
-            <a:schemeClr val="accent1"/>
-          </a:effectRef>
-          <a:fontRef idx="minor">
-            <a:schemeClr val="lt1"/>
-          </a:fontRef>
-        </p:style>
-        <p:txBody>
-          <a:bodyPr rtlCol="0" anchor="ctr"/>
-          <a:lstStyle/>
-          <a:p>
-            <a:pPr algn="ctr"/>
-          </a:p>
-        </p:txBody>
-      </p:sp>
-      <p:sp>
-        <p:nvSpPr>
-          <p:cNvPr id="5" name="TextBox 4"/>
+              <a:t>Escríbelo tú primero, sin mirar</a:t>
+            </a:r>
+          </a:p>
+        </p:txBody>
+      </p:sp>
+      <p:sp>
+        <p:nvSpPr>
+          <p:cNvPr id="4" name="TextBox 3"/>
           <p:cNvSpPr txBox="1"/>
           <p:nvPr/>
         </p:nvSpPr>
         <p:spPr>
           <a:xfrm>
-            <a:off x="840000" y="1750000"/>
-            <a:ext cx="4906000" cy="600000"/>
-          </a:xfrm>
-          <a:prstGeom prst="rect">
-            <a:avLst/>
-          </a:prstGeom>
-          <a:noFill/>
-        </p:spPr>
-        <p:txBody>
-          <a:bodyPr wrap="square">
-            <a:spAutoFit/>
-          </a:bodyPr>
-          <a:lstStyle/>
-          <a:p>
-            <a:pPr>
-              <a:spcAft>
-                <a:spcPts val="1260"/>
-              </a:spcAft>
-            </a:pPr>
-            <a:r>
-              <a:rPr sz="2800" b="1">
-                <a:solidFill>
-                  <a:srgbClr val="C2531C"/>
-                </a:solidFill>
-                <a:latin typeface="Nunito Sans"/>
-              </a:rPr>
-              <a:t>Falso dilema (sesión 20)</a:t>
-            </a:r>
-          </a:p>
-        </p:txBody>
-      </p:sp>
-      <p:sp>
-        <p:nvSpPr>
-          <p:cNvPr id="6" name="TextBox 5"/>
-          <p:cNvSpPr txBox="1"/>
-          <p:nvPr/>
-        </p:nvSpPr>
-        <p:spPr>
-          <a:xfrm>
-            <a:off x="840000" y="2400000"/>
-            <a:ext cx="4906000" cy="3500000"/>
+            <a:off x="640000" y="1800000"/>
+            <a:ext cx="10912000" cy="1500000"/>
           </a:xfrm>
           <a:prstGeom prst="rect">
             <a:avLst/>
@@ -4961,286 +5011,13 @@
               </a:spcAft>
             </a:pPr>
             <a:r>
-              <a:rPr sz="2600" b="1">
-                <a:solidFill>
-                  <a:srgbClr val="E8793A"/>
-                </a:solidFill>
-                <a:latin typeface="Nunito Sans"/>
-              </a:rPr>
-              <a:t>• </a:t>
-            </a:r>
-            <a:r>
               <a:rPr sz="2600" b="0">
                 <a:solidFill>
-                  <a:srgbClr val="1F2A44"/>
-                </a:solidFill>
-                <a:latin typeface="Nunito Sans"/>
-              </a:rPr>
-              <a:t>«O universidad o fracaso»</a:t>
-            </a:r>
-          </a:p>
-          <a:p>
-            <a:pPr>
-              <a:spcAft>
-                <a:spcPts val="1170"/>
-              </a:spcAft>
-            </a:pPr>
-            <a:r>
-              <a:rPr sz="2600" b="1">
-                <a:solidFill>
-                  <a:srgbClr val="E8793A"/>
-                </a:solidFill>
-                <a:latin typeface="Nunito Sans"/>
-              </a:rPr>
-              <a:t>• </a:t>
-            </a:r>
-            <a:r>
-              <a:rPr sz="2600" b="0">
-                <a:solidFill>
-                  <a:srgbClr val="1F2A44"/>
-                </a:solidFill>
-                <a:latin typeface="Nunito Sans"/>
-              </a:rPr>
-              <a:t>«La FP es para los que no valen»</a:t>
-            </a:r>
-          </a:p>
-          <a:p>
-            <a:pPr>
-              <a:spcAft>
-                <a:spcPts val="1170"/>
-              </a:spcAft>
-            </a:pPr>
-            <a:r>
-              <a:rPr sz="2600" b="1">
-                <a:solidFill>
-                  <a:srgbClr val="E8793A"/>
-                </a:solidFill>
-                <a:latin typeface="Nunito Sans"/>
-              </a:rPr>
-              <a:t>• </a:t>
-            </a:r>
-            <a:r>
-              <a:rPr sz="2600" b="0">
-                <a:solidFill>
-                  <a:srgbClr val="1F2A44"/>
-                </a:solidFill>
-                <a:latin typeface="Nunito Sans"/>
-              </a:rPr>
-              <a:t>«Si eliges mal, ya no hay vuelta atrás»</a:t>
-            </a:r>
-          </a:p>
-        </p:txBody>
-      </p:sp>
-      <p:sp>
-        <p:nvSpPr>
-          <p:cNvPr id="7" name="Rectangle 6"/>
-          <p:cNvSpPr/>
-          <p:nvPr/>
-        </p:nvSpPr>
-        <p:spPr>
-          <a:xfrm>
-            <a:off x="6246000" y="1650000"/>
-            <a:ext cx="5306000" cy="4400000"/>
-          </a:xfrm>
-          <a:prstGeom prst="rect">
-            <a:avLst/>
-          </a:prstGeom>
-          <a:solidFill>
-            <a:srgbClr val="EAF0F7"/>
-          </a:solidFill>
-          <a:ln>
-            <a:noFill/>
-          </a:ln>
-        </p:spPr>
-        <p:style>
-          <a:lnRef idx="1">
-            <a:schemeClr val="accent1"/>
-          </a:lnRef>
-          <a:fillRef idx="3">
-            <a:schemeClr val="accent1"/>
-          </a:fillRef>
-          <a:effectRef idx="2">
-            <a:schemeClr val="accent1"/>
-          </a:effectRef>
-          <a:fontRef idx="minor">
-            <a:schemeClr val="lt1"/>
-          </a:fontRef>
-        </p:style>
-        <p:txBody>
-          <a:bodyPr rtlCol="0" anchor="ctr"/>
-          <a:lstStyle/>
-          <a:p>
-            <a:pPr algn="ctr"/>
-          </a:p>
-        </p:txBody>
-      </p:sp>
-      <p:sp>
-        <p:nvSpPr>
-          <p:cNvPr id="8" name="TextBox 7"/>
-          <p:cNvSpPr txBox="1"/>
-          <p:nvPr/>
-        </p:nvSpPr>
-        <p:spPr>
-          <a:xfrm>
-            <a:off x="6446000" y="1750000"/>
-            <a:ext cx="4906000" cy="600000"/>
-          </a:xfrm>
-          <a:prstGeom prst="rect">
-            <a:avLst/>
-          </a:prstGeom>
-          <a:noFill/>
-        </p:spPr>
-        <p:txBody>
-          <a:bodyPr wrap="square">
-            <a:spAutoFit/>
-          </a:bodyPr>
-          <a:lstStyle/>
-          <a:p>
-            <a:pPr>
-              <a:spcAft>
-                <a:spcPts val="1260"/>
-              </a:spcAft>
-            </a:pPr>
-            <a:r>
-              <a:rPr sz="2800" b="1">
-                <a:solidFill>
-                  <a:srgbClr val="2F6FB5"/>
-                </a:solidFill>
-                <a:latin typeface="Nunito Sans"/>
-              </a:rPr>
-              <a:t>Mejor así</a:t>
-            </a:r>
-          </a:p>
-        </p:txBody>
-      </p:sp>
-      <p:sp>
-        <p:nvSpPr>
-          <p:cNvPr id="9" name="TextBox 8"/>
-          <p:cNvSpPr txBox="1"/>
-          <p:nvPr/>
-        </p:nvSpPr>
-        <p:spPr>
-          <a:xfrm>
-            <a:off x="6446000" y="2400000"/>
-            <a:ext cx="4906000" cy="3500000"/>
-          </a:xfrm>
-          <a:prstGeom prst="rect">
-            <a:avLst/>
-          </a:prstGeom>
-          <a:noFill/>
-        </p:spPr>
-        <p:txBody>
-          <a:bodyPr wrap="square">
-            <a:spAutoFit/>
-          </a:bodyPr>
-          <a:lstStyle/>
-          <a:p>
-            <a:pPr>
-              <a:spcAft>
-                <a:spcPts val="1170"/>
-              </a:spcAft>
-            </a:pPr>
-            <a:r>
-              <a:rPr sz="2600" b="1">
-                <a:solidFill>
-                  <a:srgbClr val="E8793A"/>
-                </a:solidFill>
-                <a:latin typeface="Nunito Sans"/>
-              </a:rPr>
-              <a:t>• </a:t>
-            </a:r>
-            <a:r>
-              <a:rPr sz="2600" b="0">
-                <a:solidFill>
-                  <a:srgbClr val="1F2A44"/>
-                </a:solidFill>
-                <a:latin typeface="Nunito Sans"/>
-              </a:rPr>
-              <a:t>Hay varios caminos, y </a:t>
-            </a:r>
-            <a:r>
-              <a:rPr sz="2600" b="1">
-                <a:solidFill>
-                  <a:srgbClr val="1F2A44"/>
-                </a:solidFill>
-                <a:latin typeface="Nunito Sans"/>
-              </a:rPr>
-              <a:t>se cruzan</a:t>
-            </a:r>
-          </a:p>
-          <a:p>
-            <a:pPr>
-              <a:spcAft>
-                <a:spcPts val="1170"/>
-              </a:spcAft>
-            </a:pPr>
-            <a:r>
-              <a:rPr sz="2600" b="1">
-                <a:solidFill>
-                  <a:srgbClr val="E8793A"/>
-                </a:solidFill>
-                <a:latin typeface="Nunito Sans"/>
-              </a:rPr>
-              <a:t>• </a:t>
-            </a:r>
-            <a:r>
-              <a:rPr sz="2600" b="0">
-                <a:solidFill>
-                  <a:srgbClr val="1F2A44"/>
-                </a:solidFill>
-                <a:latin typeface="Nunito Sans"/>
-              </a:rPr>
-              <a:t>La FP forma profesionales; desde grado superior se llega a la universidad</a:t>
-            </a:r>
-          </a:p>
-          <a:p>
-            <a:pPr>
-              <a:spcAft>
-                <a:spcPts val="1170"/>
-              </a:spcAft>
-            </a:pPr>
-            <a:r>
-              <a:rPr sz="2600" b="1">
-                <a:solidFill>
-                  <a:srgbClr val="E8793A"/>
-                </a:solidFill>
-                <a:latin typeface="Nunito Sans"/>
-              </a:rPr>
-              <a:t>• </a:t>
-            </a:r>
-            <a:r>
-              <a:rPr sz="2600" b="0">
-                <a:solidFill>
-                  <a:srgbClr val="1F2A44"/>
-                </a:solidFill>
-                <a:latin typeface="Nunito Sans"/>
-              </a:rPr>
-              <a:t>Se puede cambiar: de FP a Bachillerato y al revés</a:t>
-            </a:r>
-          </a:p>
-          <a:p>
-            <a:pPr>
-              <a:spcAft>
-                <a:spcPts val="1170"/>
-              </a:spcAft>
-            </a:pPr>
-            <a:r>
-              <a:rPr sz="2600" b="1">
-                <a:solidFill>
-                  <a:srgbClr val="E8793A"/>
-                </a:solidFill>
-                <a:latin typeface="Nunito Sans"/>
-              </a:rPr>
-              <a:t>• </a:t>
-            </a:r>
-            <a:r>
-              <a:rPr sz="2600" b="0">
-                <a:solidFill>
-                  <a:srgbClr val="1F2A44"/>
-                </a:solidFill>
-                <a:latin typeface="Nunito Sans"/>
-              </a:rPr>
-              <a:t>Cada camino vale según tus razones</a:t>
+                  <a:srgbClr val="4A5568"/>
+                </a:solidFill>
+                <a:latin typeface="Nunito Sans"/>
+              </a:rPr>
+              <a:t>Dos minutos. Después lo comparamos.</a:t>
             </a:r>
           </a:p>
         </p:txBody>
@@ -5318,8 +5095,8 @@
         </p:nvSpPr>
         <p:spPr>
           <a:xfrm>
-            <a:off x="640000" y="760000"/>
-            <a:ext cx="10912000" cy="800000"/>
+            <a:off x="640000" y="1300000"/>
+            <a:ext cx="10912000" cy="4800000"/>
           </a:xfrm>
           <a:prstGeom prst="rect">
             <a:avLst/>
@@ -5334,56 +5111,76 @@
           <a:p>
             <a:pPr>
               <a:spcAft>
-                <a:spcPts val="1710"/>
+                <a:spcPts val="1350"/>
               </a:spcAft>
             </a:pPr>
             <a:r>
-              <a:rPr sz="3800" b="1">
+              <a:rPr sz="3000" b="1">
+                <a:solidFill>
+                  <a:srgbClr val="E8793A"/>
+                </a:solidFill>
+                <a:latin typeface="Nunito Sans"/>
+              </a:rPr>
+              <a:t>1. </a:t>
+            </a:r>
+            <a:r>
+              <a:rPr sz="3000" b="0">
                 <a:solidFill>
                   <a:srgbClr val="1F2A44"/>
                 </a:solidFill>
-                <a:latin typeface="Fredoka"/>
-              </a:rPr>
-              <a:t>Escríbelo tú primero, sin mirar</a:t>
-            </a:r>
-          </a:p>
-        </p:txBody>
-      </p:sp>
-      <p:sp>
-        <p:nvSpPr>
-          <p:cNvPr id="4" name="TextBox 3"/>
-          <p:cNvSpPr txBox="1"/>
-          <p:nvPr/>
-        </p:nvSpPr>
-        <p:spPr>
-          <a:xfrm>
-            <a:off x="640000" y="1800000"/>
-            <a:ext cx="10912000" cy="1500000"/>
-          </a:xfrm>
-          <a:prstGeom prst="rect">
-            <a:avLst/>
-          </a:prstGeom>
-          <a:noFill/>
-        </p:spPr>
-        <p:txBody>
-          <a:bodyPr wrap="square">
-            <a:spAutoFit/>
-          </a:bodyPr>
-          <a:lstStyle/>
+                <a:latin typeface="Nunito Sans"/>
+              </a:rPr>
+              <a:t>Una muestra es la parte del grupo a la que se pregunta.</a:t>
+            </a:r>
+          </a:p>
           <a:p>
             <a:pPr>
               <a:spcAft>
-                <a:spcPts val="1170"/>
+                <a:spcPts val="1350"/>
               </a:spcAft>
             </a:pPr>
             <a:r>
-              <a:rPr sz="2600" b="0">
-                <a:solidFill>
-                  <a:srgbClr val="4A5568"/>
-                </a:solidFill>
-                <a:latin typeface="Nunito Sans"/>
-              </a:rPr>
-              <a:t>Dos minutos. Después lo comparamos.</a:t>
+              <a:rPr sz="3000" b="1">
+                <a:solidFill>
+                  <a:srgbClr val="E8793A"/>
+                </a:solidFill>
+                <a:latin typeface="Nunito Sans"/>
+              </a:rPr>
+              <a:t>2. </a:t>
+            </a:r>
+            <a:r>
+              <a:rPr sz="3000" b="0">
+                <a:solidFill>
+                  <a:srgbClr val="1F2A44"/>
+                </a:solidFill>
+                <a:latin typeface="Nunito Sans"/>
+              </a:rPr>
+              <a:t>Importa a cuántos, pero más a quiénes: una muestra grande pero sesgada sigue fallando.</a:t>
+            </a:r>
+          </a:p>
+          <a:p>
+            <a:pPr>
+              <a:spcAft>
+                <a:spcPts val="1350"/>
+              </a:spcAft>
+            </a:pPr>
+            <a:r>
+              <a:rPr sz="3000" b="1">
+                <a:solidFill>
+                  <a:srgbClr val="E8793A"/>
+                </a:solidFill>
+                <a:latin typeface="Nunito Sans"/>
+              </a:rPr>
+              <a:t>3. </a:t>
+            </a:r>
+            <a:r>
+              <a:rPr sz="3000" b="0">
+                <a:solidFill>
+                  <a:srgbClr val="1F2A44"/>
+                </a:solidFill>
+                <a:latin typeface="Nunito Sans"/>
+              </a:rPr>
+              <a:t>Mira también cómo se hizo la pregunta: puede empujar la respuesta.</a:t>
             </a:r>
           </a:p>
         </p:txBody>
@@ -5402,7 +5199,7 @@
     <p:bg>
       <p:bgPr>
         <a:solidFill>
-          <a:srgbClr val="FBF7EF"/>
+          <a:srgbClr val="1F2A44"/>
         </a:solidFill>
         <a:effectLst/>
       </p:bgPr>
@@ -5444,11 +5241,11 @@
             <a:r>
               <a:rPr sz="1400" b="1">
                 <a:solidFill>
-                  <a:srgbClr val="E8793A"/>
-                </a:solidFill>
-                <a:latin typeface="Nunito Sans"/>
-              </a:rPr>
-              <a:t>LO DE HOY EN TRES LÍNEAS</a:t>
+                  <a:srgbClr val="F4B183"/>
+                </a:solidFill>
+                <a:latin typeface="Nunito Sans"/>
+              </a:rPr>
+              <a:t>VÍDEO</a:t>
             </a:r>
           </a:p>
         </p:txBody>
@@ -5461,8 +5258,8 @@
         </p:nvSpPr>
         <p:spPr>
           <a:xfrm>
-            <a:off x="640000" y="1300000"/>
-            <a:ext cx="10912000" cy="4800000"/>
+            <a:off x="640000" y="760000"/>
+            <a:ext cx="10912000" cy="800000"/>
           </a:xfrm>
           <a:prstGeom prst="rect">
             <a:avLst/>
@@ -5477,76 +5274,56 @@
           <a:p>
             <a:pPr>
               <a:spcAft>
-                <a:spcPts val="1350"/>
+                <a:spcPts val="1620"/>
               </a:spcAft>
             </a:pPr>
             <a:r>
-              <a:rPr sz="3000" b="1">
-                <a:solidFill>
-                  <a:srgbClr val="E8793A"/>
-                </a:solidFill>
-                <a:latin typeface="Nunito Sans"/>
-              </a:rPr>
-              <a:t>1. </a:t>
-            </a:r>
-            <a:r>
-              <a:rPr sz="3000" b="0">
-                <a:solidFill>
-                  <a:srgbClr val="1F2A44"/>
-                </a:solidFill>
-                <a:latin typeface="Nunito Sans"/>
-              </a:rPr>
-              <a:t>Con el título de la ESO puedes ir a Bachillerato o a FP de grado medio.</a:t>
-            </a:r>
-          </a:p>
+              <a:rPr sz="3600" b="1">
+                <a:solidFill>
+                  <a:srgbClr val="FBF7EF"/>
+                </a:solidFill>
+                <a:latin typeface="Fredoka"/>
+              </a:rPr>
+              <a:t>Qué es una muestra y cuándo es fiable una encuesta</a:t>
+            </a:r>
+          </a:p>
+        </p:txBody>
+      </p:sp>
+      <p:sp>
+        <p:nvSpPr>
+          <p:cNvPr id="4" name="TextBox 3"/>
+          <p:cNvSpPr txBox="1"/>
+          <p:nvPr/>
+        </p:nvSpPr>
+        <p:spPr>
+          <a:xfrm>
+            <a:off x="640000" y="2200000"/>
+            <a:ext cx="10912000" cy="2000000"/>
+          </a:xfrm>
+          <a:prstGeom prst="rect">
+            <a:avLst/>
+          </a:prstGeom>
+          <a:noFill/>
+        </p:spPr>
+        <p:txBody>
+          <a:bodyPr wrap="square">
+            <a:spAutoFit/>
+          </a:bodyPr>
+          <a:lstStyle/>
           <a:p>
             <a:pPr>
               <a:spcAft>
-                <a:spcPts val="1350"/>
+                <a:spcPts val="1080"/>
               </a:spcAft>
             </a:pPr>
             <a:r>
-              <a:rPr sz="3000" b="1">
-                <a:solidFill>
-                  <a:srgbClr val="E8793A"/>
-                </a:solidFill>
-                <a:latin typeface="Nunito Sans"/>
-              </a:rPr>
-              <a:t>2. </a:t>
-            </a:r>
-            <a:r>
-              <a:rPr sz="3000" b="0">
-                <a:solidFill>
-                  <a:srgbClr val="1F2A44"/>
-                </a:solidFill>
-                <a:latin typeface="Nunito Sans"/>
-              </a:rPr>
-              <a:t>Los caminos se cruzan: la FP no es un camino peor, es otro camino.</a:t>
-            </a:r>
-          </a:p>
-          <a:p>
-            <a:pPr>
-              <a:spcAft>
-                <a:spcPts val="1350"/>
-              </a:spcAft>
-            </a:pPr>
-            <a:r>
-              <a:rPr sz="3000" b="1">
-                <a:solidFill>
-                  <a:srgbClr val="E8793A"/>
-                </a:solidFill>
-                <a:latin typeface="Nunito Sans"/>
-              </a:rPr>
-              <a:t>3. </a:t>
-            </a:r>
-            <a:r>
-              <a:rPr sz="3000" b="0">
-                <a:solidFill>
-                  <a:srgbClr val="1F2A44"/>
-                </a:solidFill>
-                <a:latin typeface="Nunito Sans"/>
-              </a:rPr>
-              <a:t>Elige con razones propias e información; el alumnado tiene derechos y también deberes.</a:t>
+              <a:rPr sz="2400" b="0">
+                <a:solidFill>
+                  <a:srgbClr val="C9D3E6"/>
+                </a:solidFill>
+                <a:latin typeface="Nunito Sans"/>
+              </a:rPr>
+              <a:t>Reforzar la idea de muestra con otra explicación y otros ejemplos.</a:t>
             </a:r>
           </a:p>
         </p:txBody>
@@ -5611,149 +5388,6 @@
                 </a:solidFill>
                 <a:latin typeface="Nunito Sans"/>
               </a:rPr>
-              <a:t>VÍDEO</a:t>
-            </a:r>
-          </a:p>
-        </p:txBody>
-      </p:sp>
-      <p:sp>
-        <p:nvSpPr>
-          <p:cNvPr id="3" name="TextBox 2"/>
-          <p:cNvSpPr txBox="1"/>
-          <p:nvPr/>
-        </p:nvSpPr>
-        <p:spPr>
-          <a:xfrm>
-            <a:off x="640000" y="760000"/>
-            <a:ext cx="10912000" cy="800000"/>
-          </a:xfrm>
-          <a:prstGeom prst="rect">
-            <a:avLst/>
-          </a:prstGeom>
-          <a:noFill/>
-        </p:spPr>
-        <p:txBody>
-          <a:bodyPr wrap="square">
-            <a:spAutoFit/>
-          </a:bodyPr>
-          <a:lstStyle/>
-          <a:p>
-            <a:pPr>
-              <a:spcAft>
-                <a:spcPts val="1620"/>
-              </a:spcAft>
-            </a:pPr>
-            <a:r>
-              <a:rPr sz="3600" b="1">
-                <a:solidFill>
-                  <a:srgbClr val="FBF7EF"/>
-                </a:solidFill>
-                <a:latin typeface="Fredoka"/>
-              </a:rPr>
-              <a:t>Qué opciones hay después de la ESO: Bachillerato y Formación Profesional en Euskadi</a:t>
-            </a:r>
-          </a:p>
-        </p:txBody>
-      </p:sp>
-      <p:sp>
-        <p:nvSpPr>
-          <p:cNvPr id="4" name="TextBox 3"/>
-          <p:cNvSpPr txBox="1"/>
-          <p:nvPr/>
-        </p:nvSpPr>
-        <p:spPr>
-          <a:xfrm>
-            <a:off x="640000" y="2200000"/>
-            <a:ext cx="10912000" cy="2000000"/>
-          </a:xfrm>
-          <a:prstGeom prst="rect">
-            <a:avLst/>
-          </a:prstGeom>
-          <a:noFill/>
-        </p:spPr>
-        <p:txBody>
-          <a:bodyPr wrap="square">
-            <a:spAutoFit/>
-          </a:bodyPr>
-          <a:lstStyle/>
-          <a:p>
-            <a:pPr>
-              <a:spcAft>
-                <a:spcPts val="1080"/>
-              </a:spcAft>
-            </a:pPr>
-            <a:r>
-              <a:rPr sz="2400" b="0">
-                <a:solidFill>
-                  <a:srgbClr val="C9D3E6"/>
-                </a:solidFill>
-                <a:latin typeface="Nunito Sans"/>
-              </a:rPr>
-              <a:t>Ver el mapa de caminos y comprobar que no es una escalera: los caminos se cruzan.</a:t>
-            </a:r>
-          </a:p>
-        </p:txBody>
-      </p:sp>
-    </p:spTree>
-  </p:cSld>
-  <p:clrMapOvr>
-    <a:masterClrMapping/>
-  </p:clrMapOvr>
-</p:sld>
-</file>
-
-<file path=ppt/slides/slide18.xml><?xml version="1.0" encoding="utf-8"?>
-<p:sld xmlns:a="http://schemas.openxmlformats.org/drawingml/2006/main" xmlns:p="http://schemas.openxmlformats.org/presentationml/2006/main" xmlns:r="http://schemas.openxmlformats.org/officeDocument/2006/relationships">
-  <p:cSld>
-    <p:bg>
-      <p:bgPr>
-        <a:solidFill>
-          <a:srgbClr val="1F2A44"/>
-        </a:solidFill>
-        <a:effectLst/>
-      </p:bgPr>
-    </p:bg>
-    <p:spTree>
-      <p:nvGrpSpPr>
-        <p:cNvPr id="1" name=""/>
-        <p:cNvGrpSpPr/>
-        <p:nvPr/>
-      </p:nvGrpSpPr>
-      <p:grpSpPr/>
-      <p:sp>
-        <p:nvSpPr>
-          <p:cNvPr id="2" name="TextBox 1"/>
-          <p:cNvSpPr txBox="1"/>
-          <p:nvPr/>
-        </p:nvSpPr>
-        <p:spPr>
-          <a:xfrm>
-            <a:off x="640000" y="380000"/>
-            <a:ext cx="10912000" cy="420000"/>
-          </a:xfrm>
-          <a:prstGeom prst="rect">
-            <a:avLst/>
-          </a:prstGeom>
-          <a:noFill/>
-        </p:spPr>
-        <p:txBody>
-          <a:bodyPr wrap="square">
-            <a:spAutoFit/>
-          </a:bodyPr>
-          <a:lstStyle/>
-          <a:p>
-            <a:pPr>
-              <a:spcAft>
-                <a:spcPts val="630"/>
-              </a:spcAft>
-            </a:pPr>
-            <a:r>
-              <a:rPr sz="1400" b="1">
-                <a:solidFill>
-                  <a:srgbClr val="F4B183"/>
-                </a:solidFill>
-                <a:latin typeface="Nunito Sans"/>
-              </a:rPr>
               <a:t>AHORA, LA HOJA DEL DÍA</a:t>
             </a:r>
           </a:p>
@@ -6347,7 +5981,7 @@
                 </a:solidFill>
                 <a:latin typeface="Nunito Sans"/>
               </a:rPr>
-              <a:t>Para los menores, la cantidad de alcohol que recomienda Sanidad es ______.  (sesión 88)</a:t>
+              <a:t>Fíate de los ______ del gráfico, no de la impresión del dibujo.  (sesión 88)</a:t>
             </a:r>
           </a:p>
           <a:p>
@@ -6372,7 +6006,7 @@
                 </a:solidFill>
                 <a:latin typeface="Nunito Sans"/>
               </a:rPr>
-              <a:t>Una ______ es perder el control sobre un consumo o una conducta.  (sesión 88)</a:t>
+              <a:t>Con el eje ______, diferencias pequeñas parecen enormes.  (sesión 88)</a:t>
             </a:r>
           </a:p>
           <a:p>
@@ -6397,7 +6031,7 @@
                 </a:solidFill>
                 <a:latin typeface="Nunito Sans"/>
               </a:rPr>
-              <a:t>Quien ______ un mensaje dañino también es responsable.  (sesión 77)</a:t>
+              <a:t>La palabra «normal» puede significar frecuente o ______.  (sesión 77)</a:t>
             </a:r>
           </a:p>
         </p:txBody>
@@ -6549,7 +6183,7 @@
                 </a:solidFill>
                 <a:latin typeface="Nunito Sans"/>
               </a:rPr>
-              <a:t>Para los menores, la cantidad de alcohol que recomienda Sanidad es </a:t>
+              <a:t>Fíate de los </a:t>
             </a:r>
             <a:r>
               <a:rPr sz="2600" b="1">
@@ -6558,7 +6192,7 @@
                 </a:solidFill>
                 <a:latin typeface="Nunito Sans"/>
               </a:rPr>
-              <a:t>cero</a:t>
+              <a:t>números</a:t>
             </a:r>
             <a:r>
               <a:rPr sz="2600" b="0">
@@ -6567,7 +6201,7 @@
                 </a:solidFill>
                 <a:latin typeface="Nunito Sans"/>
               </a:rPr>
-              <a:t>.  (sesión 88)</a:t>
+              <a:t> del gráfico, no de la impresión del dibujo.  (sesión 88)</a:t>
             </a:r>
           </a:p>
           <a:p>
@@ -6592,7 +6226,7 @@
                 </a:solidFill>
                 <a:latin typeface="Nunito Sans"/>
               </a:rPr>
-              <a:t>Una </a:t>
+              <a:t>Con el eje </a:t>
             </a:r>
             <a:r>
               <a:rPr sz="2600" b="1">
@@ -6601,7 +6235,7 @@
                 </a:solidFill>
                 <a:latin typeface="Nunito Sans"/>
               </a:rPr>
-              <a:t>adicción</a:t>
+              <a:t>cortado</a:t>
             </a:r>
             <a:r>
               <a:rPr sz="2600" b="0">
@@ -6610,7 +6244,7 @@
                 </a:solidFill>
                 <a:latin typeface="Nunito Sans"/>
               </a:rPr>
-              <a:t> es perder el control sobre un consumo o una conducta.  (sesión 88)</a:t>
+              <a:t>, diferencias pequeñas parecen enormes.  (sesión 88)</a:t>
             </a:r>
           </a:p>
           <a:p>
@@ -6635,7 +6269,7 @@
                 </a:solidFill>
                 <a:latin typeface="Nunito Sans"/>
               </a:rPr>
-              <a:t>Quien </a:t>
+              <a:t>La palabra «normal» puede significar frecuente o </a:t>
             </a:r>
             <a:r>
               <a:rPr sz="2600" b="1">
@@ -6644,7 +6278,7 @@
                 </a:solidFill>
                 <a:latin typeface="Nunito Sans"/>
               </a:rPr>
-              <a:t>reenvía</a:t>
+              <a:t>correcto</a:t>
             </a:r>
             <a:r>
               <a:rPr sz="2600" b="0">
@@ -6653,7 +6287,7 @@
                 </a:solidFill>
                 <a:latin typeface="Nunito Sans"/>
               </a:rPr>
-              <a:t> un mensaje dañino también es responsable.  (sesión 77)</a:t>
+              <a:t>.  (sesión 77)</a:t>
             </a:r>
           </a:p>
         </p:txBody>
@@ -6800,7 +6434,7 @@
                 </a:solidFill>
                 <a:latin typeface="Nunito Sans"/>
               </a:rPr>
-              <a:t>Alguien le dice a una chica: «Si no vas a la universidad, serás una fracasada».</a:t>
+              <a:t>Una youtuber de videojuegos pregunta a sus seguidores: «¿Te gustan los videojuegos?». El 95 % dice que sí.</a:t>
             </a:r>
           </a:p>
         </p:txBody>
@@ -6839,7 +6473,7 @@
                 </a:solidFill>
                 <a:latin typeface="Nunito Sans"/>
               </a:rPr>
-              <a:t>¿Cuántos caminos ves en esa frase? ¿Cuántos crees que hay de verdad?</a:t>
+              <a:t>¿Significa eso que al 95 % de los jóvenes les gustan los videojuegos?</a:t>
             </a:r>
           </a:p>
         </p:txBody>
@@ -6943,7 +6577,7 @@
                 </a:solidFill>
                 <a:latin typeface="Fredoka"/>
               </a:rPr>
-              <a:t>Después de 4.º de ESO</a:t>
+              <a:t>Qué es una muestra</a:t>
             </a:r>
           </a:p>
         </p:txBody>
@@ -7008,7 +6642,7 @@
                 </a:solidFill>
                 <a:latin typeface="Nunito Sans"/>
               </a:rPr>
-              <a:t>BLOQUE 1 · DESPUÉS DE 4.º DE ESO</a:t>
+              <a:t>BLOQUE 1 · QUÉ ES UNA MUESTRA</a:t>
             </a:r>
           </a:p>
         </p:txBody>
@@ -7047,7 +6681,7 @@
                 </a:solidFill>
                 <a:latin typeface="Fredoka"/>
               </a:rPr>
-              <a:t>Título de Graduado en ESO</a:t>
+              <a:t>Muestra</a:t>
             </a:r>
           </a:p>
         </p:txBody>
@@ -7129,7 +6763,7 @@
                 </a:solidFill>
                 <a:latin typeface="Nunito Sans"/>
               </a:rPr>
-              <a:t>Es el título que se obtiene al terminar la ESO. Abre el Bachillerato y la FP de grado medio.</a:t>
+              <a:t>Una muestra es el grupo de personas a las que se pregunta, para sacar conclusiones sobre un grupo mayor.</a:t>
             </a:r>
           </a:p>
         </p:txBody>
@@ -7171,31 +6805,22 @@
               <a:t>• </a:t>
             </a:r>
             <a:r>
+              <a:rPr sz="2800" b="1">
+                <a:solidFill>
+                  <a:srgbClr val="1F2A44"/>
+                </a:solidFill>
+                <a:latin typeface="Nunito Sans"/>
+              </a:rPr>
+              <a:t>Población:</a:t>
+            </a:r>
+            <a:r>
               <a:rPr sz="2800" b="0">
                 <a:solidFill>
                   <a:srgbClr val="1F2A44"/>
                 </a:solidFill>
                 <a:latin typeface="Nunito Sans"/>
               </a:rPr>
-              <a:t>Lo decide el </a:t>
-            </a:r>
-            <a:r>
-              <a:rPr sz="2800" b="1">
-                <a:solidFill>
-                  <a:srgbClr val="1F2A44"/>
-                </a:solidFill>
-                <a:latin typeface="Nunito Sans"/>
-              </a:rPr>
-              <a:t>equipo de profesores</a:t>
-            </a:r>
-            <a:r>
-              <a:rPr sz="2800" b="0">
-                <a:solidFill>
-                  <a:srgbClr val="1F2A44"/>
-                </a:solidFill>
-                <a:latin typeface="Nunito Sans"/>
-              </a:rPr>
-              <a:t> al final de la ESO</a:t>
+              <a:t> todo el grupo del que se habla</a:t>
             </a:r>
           </a:p>
           <a:p>
@@ -7220,7 +6845,7 @@
                 </a:solidFill>
                 <a:latin typeface="Nunito Sans"/>
               </a:rPr>
-              <a:t>FP:</a:t>
+              <a:t>Muestra:</a:t>
             </a:r>
             <a:r>
               <a:rPr sz="2800" b="0">
@@ -7229,7 +6854,7 @@
                 </a:solidFill>
                 <a:latin typeface="Nunito Sans"/>
               </a:rPr>
-              <a:t> Formación Profesional, estudios para aprender una profesión</a:t>
+              <a:t> la parte a la que se pregunta</a:t>
             </a:r>
           </a:p>
           <a:p>
@@ -7254,25 +6879,7 @@
                 </a:solidFill>
                 <a:latin typeface="Nunito Sans"/>
               </a:rPr>
-              <a:t>Sin el título: FP de </a:t>
-            </a:r>
-            <a:r>
-              <a:rPr sz="2800" b="1">
-                <a:solidFill>
-                  <a:srgbClr val="1F2A44"/>
-                </a:solidFill>
-                <a:latin typeface="Nunito Sans"/>
-              </a:rPr>
-              <a:t>grado básico</a:t>
-            </a:r>
-            <a:r>
-              <a:rPr sz="2800" b="0">
-                <a:solidFill>
-                  <a:srgbClr val="1F2A44"/>
-                </a:solidFill>
-                <a:latin typeface="Nunito Sans"/>
-              </a:rPr>
-              <a:t>, que también lo da</a:t>
+              <a:t>Como probar una cucharada para saber cómo está la sopa (bien removida)</a:t>
             </a:r>
           </a:p>
           <a:p>
@@ -7291,31 +6898,22 @@
               <a:t>• </a:t>
             </a:r>
             <a:r>
+              <a:rPr sz="2800" b="1">
+                <a:solidFill>
+                  <a:srgbClr val="1F2A44"/>
+                </a:solidFill>
+                <a:latin typeface="Nunito Sans"/>
+              </a:rPr>
+              <a:t>Al azar:</a:t>
+            </a:r>
+            <a:r>
               <a:rPr sz="2800" b="0">
                 <a:solidFill>
                   <a:srgbClr val="1F2A44"/>
                 </a:solidFill>
                 <a:latin typeface="Nunito Sans"/>
               </a:rPr>
-              <a:t>La enseñanza es </a:t>
-            </a:r>
-            <a:r>
-              <a:rPr sz="2800" b="1">
-                <a:solidFill>
-                  <a:srgbClr val="1F2A44"/>
-                </a:solidFill>
-                <a:latin typeface="Nunito Sans"/>
-              </a:rPr>
-              <a:t>obligatoria</a:t>
-            </a:r>
-            <a:r>
-              <a:rPr sz="2800" b="0">
-                <a:solidFill>
-                  <a:srgbClr val="1F2A44"/>
-                </a:solidFill>
-                <a:latin typeface="Nunito Sans"/>
-              </a:rPr>
-              <a:t> hasta los 16 años</a:t>
+              <a:t> por sorteo, sin elegir a quién</a:t>
             </a:r>
           </a:p>
         </p:txBody>
@@ -7380,7 +6978,7 @@
                 </a:solidFill>
                 <a:latin typeface="Nunito Sans"/>
               </a:rPr>
-              <a:t>BLOQUE 1 · DESPUÉS DE 4.º DE ESO</a:t>
+              <a:t>BLOQUE 1 · QUÉ ES UNA MUESTRA</a:t>
             </a:r>
           </a:p>
         </p:txBody>
@@ -7419,378 +7017,179 @@
                 </a:solidFill>
                 <a:latin typeface="Fredoka"/>
               </a:rPr>
-              <a:t>Caminos después de 4.º de ESO</a:t>
-            </a:r>
-          </a:p>
-        </p:txBody>
-      </p:sp>
-      <p:graphicFrame>
-        <p:nvGraphicFramePr>
-          <p:cNvPr id="4" name="Table 3"/>
-          <p:cNvGraphicFramePr>
-            <a:graphicFrameLocks noGrp="1"/>
-          </p:cNvGraphicFramePr>
+              <a:t>Tres preguntas a una encuesta</a:t>
+            </a:r>
+          </a:p>
+        </p:txBody>
+      </p:sp>
+      <p:sp>
+        <p:nvSpPr>
+          <p:cNvPr id="4" name="TextBox 3"/>
+          <p:cNvSpPr txBox="1"/>
           <p:nvPr/>
-        </p:nvGraphicFramePr>
-        <p:xfrm>
-          <a:off x="640000" y="1700000"/>
-          <a:ext cx="10912000" cy="3000000"/>
-        </p:xfrm>
-        <a:graphic>
-          <a:graphicData uri="http://schemas.openxmlformats.org/drawingml/2006/table">
-            <a:tbl>
-              <a:tblPr firstRow="1" bandRow="1">
-                <a:tableStyleId>{5C22544A-7EE6-4342-B048-85BDC9FD1C3A}</a:tableStyleId>
-              </a:tblPr>
-              <a:tblGrid>
-                <a:gridCol w="3637333"/>
-                <a:gridCol w="3637333"/>
-                <a:gridCol w="3637334"/>
-              </a:tblGrid>
-              <a:tr h="600000">
-                <a:tc>
-                  <a:txBody>
-                    <a:bodyPr/>
-                    <a:lstStyle/>
-                    <a:p>
-                      <a:r>
-                        <a:rPr sz="2000" b="1">
-                          <a:solidFill>
-                            <a:srgbClr val="FBF7EF"/>
-                          </a:solidFill>
-                          <a:latin typeface="Fredoka"/>
-                        </a:rPr>
-                        <a:t>Camino</a:t>
-                      </a:r>
-                    </a:p>
-                  </a:txBody>
-                  <a:tcPr>
-                    <a:solidFill>
-                      <a:srgbClr val="1F2A44"/>
-                    </a:solidFill>
-                  </a:tcPr>
-                </a:tc>
-                <a:tc>
-                  <a:txBody>
-                    <a:bodyPr/>
-                    <a:lstStyle/>
-                    <a:p>
-                      <a:r>
-                        <a:rPr sz="2000" b="1">
-                          <a:solidFill>
-                            <a:srgbClr val="FBF7EF"/>
-                          </a:solidFill>
-                          <a:latin typeface="Fredoka"/>
-                        </a:rPr>
-                        <a:t>Qué es</a:t>
-                      </a:r>
-                    </a:p>
-                  </a:txBody>
-                  <a:tcPr>
-                    <a:solidFill>
-                      <a:srgbClr val="1F2A44"/>
-                    </a:solidFill>
-                  </a:tcPr>
-                </a:tc>
-                <a:tc>
-                  <a:txBody>
-                    <a:bodyPr/>
-                    <a:lstStyle/>
-                    <a:p>
-                      <a:r>
-                        <a:rPr sz="2000" b="1">
-                          <a:solidFill>
-                            <a:srgbClr val="FBF7EF"/>
-                          </a:solidFill>
-                          <a:latin typeface="Fredoka"/>
-                        </a:rPr>
-                        <a:t>Y después</a:t>
-                      </a:r>
-                    </a:p>
-                  </a:txBody>
-                  <a:tcPr>
-                    <a:solidFill>
-                      <a:srgbClr val="1F2A44"/>
-                    </a:solidFill>
-                  </a:tcPr>
-                </a:tc>
-              </a:tr>
-              <a:tr h="600000">
-                <a:tc>
-                  <a:txBody>
-                    <a:bodyPr/>
-                    <a:lstStyle/>
-                    <a:p>
-                      <a:r>
-                        <a:rPr sz="2000" b="1">
-                          <a:solidFill>
-                            <a:srgbClr val="1F2A44"/>
-                          </a:solidFill>
-                          <a:latin typeface="Nunito Sans"/>
-                        </a:rPr>
-                        <a:t>Bachillerato</a:t>
-                      </a:r>
-                    </a:p>
-                  </a:txBody>
-                  <a:tcPr>
-                    <a:solidFill>
-                      <a:srgbClr val="FFFFFF"/>
-                    </a:solidFill>
-                  </a:tcPr>
-                </a:tc>
-                <a:tc>
-                  <a:txBody>
-                    <a:bodyPr/>
-                    <a:lstStyle/>
-                    <a:p>
-                      <a:r>
-                        <a:rPr sz="2000" b="0">
-                          <a:solidFill>
-                            <a:srgbClr val="1F2A44"/>
-                          </a:solidFill>
-                          <a:latin typeface="Nunito Sans"/>
-                        </a:rPr>
-                        <a:t>Dos cursos de estudios generales, por modalidades</a:t>
-                      </a:r>
-                    </a:p>
-                  </a:txBody>
-                  <a:tcPr>
-                    <a:solidFill>
-                      <a:srgbClr val="FFFFFF"/>
-                    </a:solidFill>
-                  </a:tcPr>
-                </a:tc>
-                <a:tc>
-                  <a:txBody>
-                    <a:bodyPr/>
-                    <a:lstStyle/>
-                    <a:p>
-                      <a:r>
-                        <a:rPr sz="2000" b="0">
-                          <a:solidFill>
-                            <a:srgbClr val="1F2A44"/>
-                          </a:solidFill>
-                          <a:latin typeface="Nunito Sans"/>
-                        </a:rPr>
-                        <a:t>Universidad o FP de grado superior</a:t>
-                      </a:r>
-                    </a:p>
-                  </a:txBody>
-                  <a:tcPr>
-                    <a:solidFill>
-                      <a:srgbClr val="FFFFFF"/>
-                    </a:solidFill>
-                  </a:tcPr>
-                </a:tc>
-              </a:tr>
-              <a:tr h="600000">
-                <a:tc>
-                  <a:txBody>
-                    <a:bodyPr/>
-                    <a:lstStyle/>
-                    <a:p>
-                      <a:r>
-                        <a:rPr sz="2000" b="1">
-                          <a:solidFill>
-                            <a:srgbClr val="1F2A44"/>
-                          </a:solidFill>
-                          <a:latin typeface="Nunito Sans"/>
-                        </a:rPr>
-                        <a:t>FP de grado medio</a:t>
-                      </a:r>
-                    </a:p>
-                  </a:txBody>
-                  <a:tcPr>
-                    <a:solidFill>
-                      <a:srgbClr val="EAF0F7"/>
-                    </a:solidFill>
-                  </a:tcPr>
-                </a:tc>
-                <a:tc>
-                  <a:txBody>
-                    <a:bodyPr/>
-                    <a:lstStyle/>
-                    <a:p>
-                      <a:r>
-                        <a:rPr sz="2000" b="0">
-                          <a:solidFill>
-                            <a:srgbClr val="1F2A44"/>
-                          </a:solidFill>
-                          <a:latin typeface="Nunito Sans"/>
-                        </a:rPr>
-                        <a:t>Dos cursos para aprender una profesión, con prácticas en empresas</a:t>
-                      </a:r>
-                    </a:p>
-                  </a:txBody>
-                  <a:tcPr>
-                    <a:solidFill>
-                      <a:srgbClr val="EAF0F7"/>
-                    </a:solidFill>
-                  </a:tcPr>
-                </a:tc>
-                <a:tc>
-                  <a:txBody>
-                    <a:bodyPr/>
-                    <a:lstStyle/>
-                    <a:p>
-                      <a:r>
-                        <a:rPr sz="2000" b="0">
-                          <a:solidFill>
-                            <a:srgbClr val="1F2A44"/>
-                          </a:solidFill>
-                          <a:latin typeface="Nunito Sans"/>
-                        </a:rPr>
-                        <a:t>Trabajar, FP de grado superior o Bachillerato</a:t>
-                      </a:r>
-                    </a:p>
-                  </a:txBody>
-                  <a:tcPr>
-                    <a:solidFill>
-                      <a:srgbClr val="EAF0F7"/>
-                    </a:solidFill>
-                  </a:tcPr>
-                </a:tc>
-              </a:tr>
-              <a:tr h="600000">
-                <a:tc>
-                  <a:txBody>
-                    <a:bodyPr/>
-                    <a:lstStyle/>
-                    <a:p>
-                      <a:r>
-                        <a:rPr sz="2000" b="1">
-                          <a:solidFill>
-                            <a:srgbClr val="1F2A44"/>
-                          </a:solidFill>
-                          <a:latin typeface="Nunito Sans"/>
-                        </a:rPr>
-                        <a:t>FP de grado básico</a:t>
-                      </a:r>
-                    </a:p>
-                  </a:txBody>
-                  <a:tcPr>
-                    <a:solidFill>
-                      <a:srgbClr val="FFFFFF"/>
-                    </a:solidFill>
-                  </a:tcPr>
-                </a:tc>
-                <a:tc>
-                  <a:txBody>
-                    <a:bodyPr/>
-                    <a:lstStyle/>
-                    <a:p>
-                      <a:r>
-                        <a:rPr sz="2000" b="0">
-                          <a:solidFill>
-                            <a:srgbClr val="1F2A44"/>
-                          </a:solidFill>
-                          <a:latin typeface="Nunito Sans"/>
-                        </a:rPr>
-                        <a:t>Sin título de ESO: aprendes una profesión y te da el título</a:t>
-                      </a:r>
-                    </a:p>
-                  </a:txBody>
-                  <a:tcPr>
-                    <a:solidFill>
-                      <a:srgbClr val="FFFFFF"/>
-                    </a:solidFill>
-                  </a:tcPr>
-                </a:tc>
-                <a:tc>
-                  <a:txBody>
-                    <a:bodyPr/>
-                    <a:lstStyle/>
-                    <a:p>
-                      <a:r>
-                        <a:rPr sz="2000" b="0">
-                          <a:solidFill>
-                            <a:srgbClr val="1F2A44"/>
-                          </a:solidFill>
-                          <a:latin typeface="Nunito Sans"/>
-                        </a:rPr>
-                        <a:t>FP de grado medio o trabajar</a:t>
-                      </a:r>
-                    </a:p>
-                  </a:txBody>
-                  <a:tcPr>
-                    <a:solidFill>
-                      <a:srgbClr val="FFFFFF"/>
-                    </a:solidFill>
-                  </a:tcPr>
-                </a:tc>
-              </a:tr>
-              <a:tr h="600000">
-                <a:tc>
-                  <a:txBody>
-                    <a:bodyPr/>
-                    <a:lstStyle/>
-                    <a:p>
-                      <a:r>
-                        <a:rPr sz="2000" b="1">
-                          <a:solidFill>
-                            <a:srgbClr val="1F2A44"/>
-                          </a:solidFill>
-                          <a:latin typeface="Nunito Sans"/>
-                        </a:rPr>
-                        <a:t>FP de grado superior</a:t>
-                      </a:r>
-                    </a:p>
-                  </a:txBody>
-                  <a:tcPr>
-                    <a:solidFill>
-                      <a:srgbClr val="EAF0F7"/>
-                    </a:solidFill>
-                  </a:tcPr>
-                </a:tc>
-                <a:tc>
-                  <a:txBody>
-                    <a:bodyPr/>
-                    <a:lstStyle/>
-                    <a:p>
-                      <a:r>
-                        <a:rPr sz="2000" b="0">
-                          <a:solidFill>
-                            <a:srgbClr val="1F2A44"/>
-                          </a:solidFill>
-                          <a:latin typeface="Nunito Sans"/>
-                        </a:rPr>
-                        <a:t>Tras Bachillerato o grado medio: dos cursos más especializados</a:t>
-                      </a:r>
-                    </a:p>
-                  </a:txBody>
-                  <a:tcPr>
-                    <a:solidFill>
-                      <a:srgbClr val="EAF0F7"/>
-                    </a:solidFill>
-                  </a:tcPr>
-                </a:tc>
-                <a:tc>
-                  <a:txBody>
-                    <a:bodyPr/>
-                    <a:lstStyle/>
-                    <a:p>
-                      <a:r>
-                        <a:rPr sz="2000" b="0">
-                          <a:solidFill>
-                            <a:srgbClr val="1F2A44"/>
-                          </a:solidFill>
-                          <a:latin typeface="Nunito Sans"/>
-                        </a:rPr>
-                        <a:t>Trabajar o universidad</a:t>
-                      </a:r>
-                    </a:p>
-                  </a:txBody>
-                  <a:tcPr>
-                    <a:solidFill>
-                      <a:srgbClr val="EAF0F7"/>
-                    </a:solidFill>
-                  </a:tcPr>
-                </a:tc>
-              </a:tr>
-            </a:tbl>
-          </a:graphicData>
-        </a:graphic>
-      </p:graphicFrame>
+        </p:nvSpPr>
+        <p:spPr>
+          <a:xfrm>
+            <a:off x="640000" y="1650000"/>
+            <a:ext cx="10912000" cy="4808000"/>
+          </a:xfrm>
+          <a:prstGeom prst="rect">
+            <a:avLst/>
+          </a:prstGeom>
+          <a:noFill/>
+        </p:spPr>
+        <p:txBody>
+          <a:bodyPr wrap="square">
+            <a:spAutoFit/>
+          </a:bodyPr>
+          <a:lstStyle/>
+          <a:p>
+            <a:pPr>
+              <a:spcAft>
+                <a:spcPts val="1260"/>
+              </a:spcAft>
+            </a:pPr>
+            <a:r>
+              <a:rPr sz="2800" b="1">
+                <a:solidFill>
+                  <a:srgbClr val="E8793A"/>
+                </a:solidFill>
+                <a:latin typeface="Nunito Sans"/>
+              </a:rPr>
+              <a:t>• </a:t>
+            </a:r>
+            <a:r>
+              <a:rPr sz="2800" b="1">
+                <a:solidFill>
+                  <a:srgbClr val="1F2A44"/>
+                </a:solidFill>
+                <a:latin typeface="Nunito Sans"/>
+              </a:rPr>
+              <a:t>¿A cuántos?</a:t>
+            </a:r>
+            <a:r>
+              <a:rPr sz="2800" b="0">
+                <a:solidFill>
+                  <a:srgbClr val="1F2A44"/>
+                </a:solidFill>
+                <a:latin typeface="Nunito Sans"/>
+              </a:rPr>
+              <a:t> Con 5 personas se puede decir muy poco de miles</a:t>
+            </a:r>
+          </a:p>
+          <a:p>
+            <a:pPr>
+              <a:spcAft>
+                <a:spcPts val="1260"/>
+              </a:spcAft>
+            </a:pPr>
+            <a:r>
+              <a:rPr sz="2800" b="1">
+                <a:solidFill>
+                  <a:srgbClr val="E8793A"/>
+                </a:solidFill>
+                <a:latin typeface="Nunito Sans"/>
+              </a:rPr>
+              <a:t>• </a:t>
+            </a:r>
+            <a:r>
+              <a:rPr sz="2800" b="1">
+                <a:solidFill>
+                  <a:srgbClr val="1F2A44"/>
+                </a:solidFill>
+                <a:latin typeface="Nunito Sans"/>
+              </a:rPr>
+              <a:t>¿A quiénes?</a:t>
+            </a:r>
+            <a:r>
+              <a:rPr sz="2800" b="0">
+                <a:solidFill>
+                  <a:srgbClr val="1F2A44"/>
+                </a:solidFill>
+                <a:latin typeface="Nunito Sans"/>
+              </a:rPr>
+              <a:t> La muestra tiene que parecerse a la población</a:t>
+            </a:r>
+          </a:p>
+          <a:p>
+            <a:pPr>
+              <a:spcAft>
+                <a:spcPts val="1260"/>
+              </a:spcAft>
+            </a:pPr>
+            <a:r>
+              <a:rPr sz="2800" b="1">
+                <a:solidFill>
+                  <a:srgbClr val="E8793A"/>
+                </a:solidFill>
+                <a:latin typeface="Nunito Sans"/>
+              </a:rPr>
+              <a:t>• </a:t>
+            </a:r>
+            <a:r>
+              <a:rPr sz="2800" b="1">
+                <a:solidFill>
+                  <a:srgbClr val="1F2A44"/>
+                </a:solidFill>
+                <a:latin typeface="Nunito Sans"/>
+              </a:rPr>
+              <a:t>¿Cómo se preguntó?</a:t>
+            </a:r>
+            <a:r>
+              <a:rPr sz="2800" b="0">
+                <a:solidFill>
+                  <a:srgbClr val="1F2A44"/>
+                </a:solidFill>
+                <a:latin typeface="Nunito Sans"/>
+              </a:rPr>
+              <a:t> La pregunta también puede empujar la respuesta</a:t>
+            </a:r>
+          </a:p>
+          <a:p>
+            <a:pPr>
+              <a:spcAft>
+                <a:spcPts val="1260"/>
+              </a:spcAft>
+            </a:pPr>
+            <a:r>
+              <a:rPr sz="2800" b="1">
+                <a:solidFill>
+                  <a:srgbClr val="E8793A"/>
+                </a:solidFill>
+                <a:latin typeface="Nunito Sans"/>
+              </a:rPr>
+              <a:t>• </a:t>
+            </a:r>
+            <a:r>
+              <a:rPr sz="2800" b="0">
+                <a:solidFill>
+                  <a:srgbClr val="1F2A44"/>
+                </a:solidFill>
+                <a:latin typeface="Nunito Sans"/>
+              </a:rPr>
+              <a:t>Una muestra que no se parece está </a:t>
+            </a:r>
+            <a:r>
+              <a:rPr sz="2800" b="1">
+                <a:solidFill>
+                  <a:srgbClr val="1F2A44"/>
+                </a:solidFill>
+                <a:latin typeface="Nunito Sans"/>
+              </a:rPr>
+              <a:t>sesgada</a:t>
+            </a:r>
+            <a:r>
+              <a:rPr sz="2800" b="0">
+                <a:solidFill>
+                  <a:srgbClr val="1F2A44"/>
+                </a:solidFill>
+                <a:latin typeface="Nunito Sans"/>
+              </a:rPr>
+              <a:t>: torcida, inclinada hacia un lado</a:t>
+            </a:r>
+          </a:p>
+        </p:txBody>
+      </p:sp>
     </p:spTree>
   </p:cSld>
   <p:clrMapOvr>
@@ -7851,7 +7250,7 @@
                 </a:solidFill>
                 <a:latin typeface="Nunito Sans"/>
               </a:rPr>
-              <a:t>BLOQUE 1 · DESPUÉS DE 4.º DE ESO</a:t>
+              <a:t>BLOQUE 1 · QUÉ ES UNA MUESTRA</a:t>
             </a:r>
           </a:p>
         </p:txBody>
@@ -7890,7 +7289,7 @@
                 </a:solidFill>
                 <a:latin typeface="Fredoka"/>
               </a:rPr>
-              <a:t>Algunos derechos y deberes en el instituto</a:t>
+              <a:t>Muestras malas y mejores</a:t>
             </a:r>
           </a:p>
         </p:txBody>
@@ -7931,7 +7330,7 @@
                           </a:solidFill>
                           <a:latin typeface="Fredoka"/>
                         </a:rPr>
-                        <a:t>Quién</a:t>
+                        <a:t>Quiero saber…</a:t>
                       </a:r>
                     </a:p>
                   </a:txBody>
@@ -7953,7 +7352,7 @@
                           </a:solidFill>
                           <a:latin typeface="Fredoka"/>
                         </a:rPr>
-                        <a:t>Algunos derechos</a:t>
+                        <a:t>Muestra mala</a:t>
                       </a:r>
                     </a:p>
                   </a:txBody>
@@ -7975,7 +7374,7 @@
                           </a:solidFill>
                           <a:latin typeface="Fredoka"/>
                         </a:rPr>
-                        <a:t>Algunos deberes</a:t>
+                        <a:t>Muestra mejor</a:t>
                       </a:r>
                     </a:p>
                   </a:txBody>
@@ -7993,13 +7392,13 @@
                     <a:lstStyle/>
                     <a:p>
                       <a:r>
-                        <a:rPr sz="2000" b="1">
+                        <a:rPr sz="2000" b="0">
                           <a:solidFill>
                             <a:srgbClr val="1F2A44"/>
                           </a:solidFill>
                           <a:latin typeface="Nunito Sans"/>
                         </a:rPr>
-                        <a:t>Alumnado</a:t>
+                        <a:t>Qué deporte prefiere el alumnado</a:t>
                       </a:r>
                     </a:p>
                   </a:txBody>
@@ -8021,25 +7420,7 @@
                           </a:solidFill>
                           <a:latin typeface="Nunito Sans"/>
                         </a:rPr>
-                        <a:t>Formación, respeto, evaluación </a:t>
-                      </a:r>
-                      <a:r>
-                        <a:rPr sz="2000" b="1">
-                          <a:solidFill>
-                            <a:srgbClr val="1F2A44"/>
-                          </a:solidFill>
-                          <a:latin typeface="Nunito Sans"/>
-                        </a:rPr>
-                        <a:t>objetiva</a:t>
-                      </a:r>
-                      <a:r>
-                        <a:rPr sz="2000" b="0">
-                          <a:solidFill>
-                            <a:srgbClr val="1F2A44"/>
-                          </a:solidFill>
-                          <a:latin typeface="Nunito Sans"/>
-                        </a:rPr>
-                        <a:t>, orientación</a:t>
+                        <a:t>Solo el equipo de fútbol</a:t>
                       </a:r>
                     </a:p>
                   </a:txBody>
@@ -8061,7 +7442,7 @@
                           </a:solidFill>
                           <a:latin typeface="Nunito Sans"/>
                         </a:rPr>
-                        <a:t>Estudiar, asistir, respetar a todos y las normas</a:t>
+                        <a:t>Alumnos al azar de todos los cursos</a:t>
                       </a:r>
                     </a:p>
                   </a:txBody>
@@ -8079,13 +7460,13 @@
                     <a:lstStyle/>
                     <a:p>
                       <a:r>
-                        <a:rPr sz="2000" b="1">
+                        <a:rPr sz="2000" b="0">
                           <a:solidFill>
                             <a:srgbClr val="1F2A44"/>
                           </a:solidFill>
                           <a:latin typeface="Nunito Sans"/>
                         </a:rPr>
-                        <a:t>Familias</a:t>
+                        <a:t>Si gusta el comedor</a:t>
                       </a:r>
                     </a:p>
                   </a:txBody>
@@ -8107,7 +7488,7 @@
                           </a:solidFill>
                           <a:latin typeface="Nunito Sans"/>
                         </a:rPr>
-                        <a:t>Estar informadas y participar en el centro</a:t>
+                        <a:t>Los 3 amigos de un chico</a:t>
                       </a:r>
                     </a:p>
                   </a:txBody>
@@ -8129,7 +7510,7 @@
                           </a:solidFill>
                           <a:latin typeface="Nunito Sans"/>
                         </a:rPr>
-                        <a:t>Colaborar con el centro y cuidar la asistencia</a:t>
+                        <a:t>100 alumnos elegidos al azar</a:t>
                       </a:r>
                     </a:p>
                   </a:txBody>
@@ -8147,13 +7528,13 @@
                     <a:lstStyle/>
                     <a:p>
                       <a:r>
-                        <a:rPr sz="2000" b="1">
+                        <a:rPr sz="2000" b="0">
                           <a:solidFill>
                             <a:srgbClr val="1F2A44"/>
                           </a:solidFill>
                           <a:latin typeface="Nunito Sans"/>
                         </a:rPr>
-                        <a:t>Profesorado</a:t>
+                        <a:t>Cuánto usan el móvil en 2.º ESO</a:t>
                       </a:r>
                     </a:p>
                   </a:txBody>
@@ -8175,7 +7556,7 @@
                           </a:solidFill>
                           <a:latin typeface="Nunito Sans"/>
                         </a:rPr>
-                        <a:t>Respeto y apoyo para enseñar</a:t>
+                        <a:t>Solo quien contesta en Instagram</a:t>
                       </a:r>
                     </a:p>
                   </a:txBody>
@@ -8197,7 +7578,7 @@
                           </a:solidFill>
                           <a:latin typeface="Nunito Sans"/>
                         </a:rPr>
-                        <a:t>Enseñar, evaluar con objetividad y orientar</a:t>
+                        <a:t>Todos los grupos de 2.º, encuesta anónima</a:t>
                       </a:r>
                     </a:p>
                   </a:txBody>
